--- a/output/pptx/ocean-mobility-energy-investor.pptx
+++ b/output/pptx/ocean-mobility-energy-investor.pptx
@@ -1397,7 +1397,7 @@
           <a:p>
             <a:r>
               <a:rPr lang="en-US" dirty="0"/>
-              <a:t/>
+              <a:t>Ocean leadership confirmed on 27 Sep 2026 that the supplied drone photo is a real Ocean project. No project size, customer or performance claim is inferred from it.</a:t>
             </a:r>
             <a:endParaRPr lang="en-US" dirty="0"/>
           </a:p>
@@ -2212,7 +2212,7 @@
       </p:grpSpPr>
       <p:pic>
         <p:nvPicPr>
-          <p:cNvPr id="2" name="ocean:texture" descr="/home/user/workspace/audit/repo/assets/textures/tex_deck_sage.png">    </p:cNvPr>
+          <p:cNvPr id="2" name="ocean:texture" descr="C:\Users\sctho\OneDrive\Documents\ChatGPT\ocean-brand-system\assets\textures\tex_deck_sage.png">    </p:cNvPr>
           <p:cNvPicPr>
             <a:picLocks noChangeAspect="1"/>
           </p:cNvPicPr>
@@ -2294,7 +2294,7 @@
       </p:sp>
       <p:pic>
         <p:nvPicPr>
-          <p:cNvPr id="4" name="ocean:logo-vertical" descr="/home/user/workspace/audit/repo/assets/logos/png/logo_vertical_honeydew.png">    </p:cNvPr>
+          <p:cNvPr id="4" name="ocean:logo-vertical" descr="C:\Users\sctho\OneDrive\Documents\ChatGPT\ocean-brand-system\assets\logos\png\logo_vertical_honeydew.png">    </p:cNvPr>
           <p:cNvPicPr>
             <a:picLocks noChangeAspect="1"/>
           </p:cNvPicPr>
@@ -2771,7 +2771,7 @@
       </p:grpSpPr>
       <p:pic>
         <p:nvPicPr>
-          <p:cNvPr id="2" name="ocean:environment" descr="/home/user/workspace/audit/repo/assets/environments/env_olive_map_dark.jpg">    </p:cNvPr>
+          <p:cNvPr id="2" name="ocean:environment" descr="C:\Users\sctho\OneDrive\Documents\ChatGPT\ocean-brand-system\assets\environments\env_olive_map_dark.jpg">    </p:cNvPr>
           <p:cNvPicPr>
             <a:picLocks noChangeAspect="1"/>
           </p:cNvPicPr>
@@ -2795,7 +2795,7 @@
       </p:pic>
       <p:pic>
         <p:nvPicPr>
-          <p:cNvPr id="3" name="ocean:logo-graphic" descr="/home/user/workspace/audit/repo/assets/logos/png/logo_graphic_honeydew.png">    </p:cNvPr>
+          <p:cNvPr id="3" name="ocean:logo-graphic" descr="C:\Users\sctho\OneDrive\Documents\ChatGPT\ocean-brand-system\assets\logos\png\logo_graphic_honeydew.png">    </p:cNvPr>
           <p:cNvPicPr>
             <a:picLocks noChangeAspect="1"/>
           </p:cNvPicPr>
@@ -3081,7 +3081,7 @@
       </p:sp>
       <p:pic>
         <p:nvPicPr>
-          <p:cNvPr id="3" name="ocean:logo-horizontal" descr="/home/user/workspace/audit/repo/assets/logos/png/logo_horizontal_olive.png">    </p:cNvPr>
+          <p:cNvPr id="3" name="ocean:logo-horizontal" descr="C:\Users\sctho\OneDrive\Documents\ChatGPT\ocean-brand-system\assets\logos\png\logo_horizontal_olive.png">    </p:cNvPr>
           <p:cNvPicPr>
             <a:picLocks noChangeAspect="1"/>
           </p:cNvPicPr>
@@ -4868,7 +4868,7 @@
       </p:sp>
       <p:pic>
         <p:nvPicPr>
-          <p:cNvPr id="3" name="ocean:logo-horizontal" descr="/home/user/workspace/audit/repo/assets/logos/png/logo_horizontal_olive.png">    </p:cNvPr>
+          <p:cNvPr id="3" name="ocean:logo-horizontal" descr="C:\Users\sctho\OneDrive\Documents\ChatGPT\ocean-brand-system\assets\logos\png\logo_horizontal_olive.png">    </p:cNvPr>
           <p:cNvPicPr>
             <a:picLocks noChangeAspect="1"/>
           </p:cNvPicPr>
@@ -6554,7 +6554,7 @@
       </p:grpSpPr>
       <p:pic>
         <p:nvPicPr>
-          <p:cNvPr id="2" name="ocean:texture" descr="/home/user/workspace/audit/repo/assets/textures/tex_deck_blackmoss.png">    </p:cNvPr>
+          <p:cNvPr id="2" name="ocean:texture" descr="C:\Users\sctho\OneDrive\Documents\ChatGPT\ocean-brand-system\assets\textures\tex_deck_blackmoss.png">    </p:cNvPr>
           <p:cNvPicPr>
             <a:picLocks noChangeAspect="1"/>
           </p:cNvPicPr>
@@ -6578,7 +6578,7 @@
       </p:pic>
       <p:pic>
         <p:nvPicPr>
-          <p:cNvPr id="4" name="ocean:logo-graphic" descr="/home/user/workspace/audit/repo/assets/logos/png/logo_graphic_honeydew.png">    </p:cNvPr>
+          <p:cNvPr id="4" name="ocean:logo-graphic" descr="C:\Users\sctho\OneDrive\Documents\ChatGPT\ocean-brand-system\assets\logos\png\logo_graphic_honeydew.png">    </p:cNvPr>
           <p:cNvPicPr>
             <a:picLocks noChangeAspect="1"/>
           </p:cNvPicPr>
@@ -7035,7 +7035,7 @@
       </p:sp>
       <p:pic>
         <p:nvPicPr>
-          <p:cNvPr id="3" name="ocean:logo-horizontal" descr="/home/user/workspace/audit/repo/assets/logos/png/logo_horizontal_blackmoss.png">    </p:cNvPr>
+          <p:cNvPr id="3" name="ocean:logo-horizontal" descr="C:\Users\sctho\OneDrive\Documents\ChatGPT\ocean-brand-system\assets\logos\png\logo_horizontal_blackmoss.png">    </p:cNvPr>
           <p:cNvPicPr>
             <a:picLocks noChangeAspect="1"/>
           </p:cNvPicPr>
@@ -9165,7 +9165,7 @@
       </p:grpSpPr>
       <p:pic>
         <p:nvPicPr>
-          <p:cNvPr id="2" name="ocean:logo-graphic" descr="/home/user/workspace/audit/repo/assets/logos/png/logo_graphic_blackmoss.png">    </p:cNvPr>
+          <p:cNvPr id="2" name="ocean:logo-graphic" descr="C:\Users\sctho\OneDrive\Documents\ChatGPT\ocean-brand-system\assets\logos\png\logo_graphic_blackmoss.png">    </p:cNvPr>
           <p:cNvPicPr>
             <a:picLocks noChangeAspect="1"/>
           </p:cNvPicPr>
@@ -9641,7 +9641,7 @@
       </p:grpSpPr>
       <p:pic>
         <p:nvPicPr>
-          <p:cNvPr id="2" name="ocean:texture" descr="/home/user/workspace/audit/repo/assets/textures/tex_deck_sage.png">    </p:cNvPr>
+          <p:cNvPr id="2" name="ocean:texture" descr="C:\Users\sctho\OneDrive\Documents\ChatGPT\ocean-brand-system\assets\textures\tex_deck_sage.png">    </p:cNvPr>
           <p:cNvPicPr>
             <a:picLocks noChangeAspect="1"/>
           </p:cNvPicPr>
@@ -9665,7 +9665,7 @@
       </p:pic>
       <p:pic>
         <p:nvPicPr>
-          <p:cNvPr id="3" name="ocean:logo-vertical" descr="/home/user/workspace/audit/repo/assets/logos/png/logo_vertical_honeydew.png">    </p:cNvPr>
+          <p:cNvPr id="3" name="ocean:logo-vertical" descr="C:\Users\sctho\OneDrive\Documents\ChatGPT\ocean-brand-system\assets\logos\png\logo_vertical_honeydew.png">    </p:cNvPr>
           <p:cNvPicPr>
             <a:picLocks noChangeAspect="1"/>
           </p:cNvPicPr>
@@ -9721,7 +9721,7 @@
       </p:grpSpPr>
       <p:pic>
         <p:nvPicPr>
-          <p:cNvPr id="2" name="ocean:logo-horizontal" descr="/home/user/workspace/audit/repo/assets/logos/png/logo_horizontal_blackmoss.png">    </p:cNvPr>
+          <p:cNvPr id="2" name="ocean:logo-horizontal" descr="C:\Users\sctho\OneDrive\Documents\ChatGPT\ocean-brand-system\assets\logos\png\logo_horizontal_blackmoss.png">    </p:cNvPr>
           <p:cNvPicPr>
             <a:picLocks noChangeAspect="1"/>
           </p:cNvPicPr>
@@ -10589,7 +10589,7 @@
       </p:grpSpPr>
       <p:pic>
         <p:nvPicPr>
-          <p:cNvPr id="2" name="ocean:environment" descr="/home/user/workspace/audit/repo/assets/environments/env_peacock_map_light.jpg">    </p:cNvPr>
+          <p:cNvPr id="2" name="ocean:environment" descr="C:\Users\sctho\OneDrive\Documents\ChatGPT\ocean-brand-system\assets\environments\env_peacock_map_light.jpg">    </p:cNvPr>
           <p:cNvPicPr>
             <a:picLocks noChangeAspect="1"/>
           </p:cNvPicPr>
@@ -10613,7 +10613,7 @@
       </p:pic>
       <p:pic>
         <p:nvPicPr>
-          <p:cNvPr id="3" name="ocean:logo-graphic" descr="/home/user/workspace/audit/repo/assets/logos/png/logo_graphic_honeydew.png">    </p:cNvPr>
+          <p:cNvPr id="3" name="ocean:logo-graphic" descr="C:\Users\sctho\OneDrive\Documents\ChatGPT\ocean-brand-system\assets\logos\png\logo_graphic_honeydew.png">    </p:cNvPr>
           <p:cNvPicPr>
             <a:picLocks noChangeAspect="1"/>
           </p:cNvPicPr>
@@ -10857,7 +10857,7 @@
       </p:grpSpPr>
       <p:sp>
         <p:nvSpPr>
-          <p:cNvPr id="2" name="ocean:header"/>
+          <p:cNvPr id="3" name="ocean:header"/>
           <p:cNvSpPr/>
           <p:nvPr/>
         </p:nvSpPr>
@@ -10879,7 +10879,7 @@
       </p:sp>
       <p:pic>
         <p:nvPicPr>
-          <p:cNvPr id="3" name="ocean:logo-horizontal" descr="/home/user/workspace/audit/repo/assets/logos/png/logo_horizontal_peacock.png">    </p:cNvPr>
+          <p:cNvPr id="4" name="ocean:logo-horizontal" descr="C:\Users\sctho\OneDrive\Documents\ChatGPT\ocean-brand-system\assets\logos\png\logo_horizontal_peacock.png">    </p:cNvPr>
           <p:cNvPicPr>
             <a:picLocks noChangeAspect="1"/>
           </p:cNvPicPr>
@@ -10903,7 +10903,7 @@
       </p:pic>
       <p:sp>
         <p:nvSpPr>
-          <p:cNvPr id="4" name="Shape 1"/>
+          <p:cNvPr id="5" name="Shape 1"/>
           <p:cNvSpPr/>
           <p:nvPr/>
         </p:nvSpPr>
@@ -10926,7 +10926,7 @@
       </p:sp>
       <p:sp>
         <p:nvSpPr>
-          <p:cNvPr id="5" name="ocean:header"/>
+          <p:cNvPr id="6" name="ocean:header"/>
           <p:cNvSpPr/>
           <p:nvPr/>
         </p:nvSpPr>
@@ -10968,7 +10968,7 @@
       </p:sp>
       <p:sp>
         <p:nvSpPr>
-          <p:cNvPr id="6" name="ocean:header"/>
+          <p:cNvPr id="7" name="ocean:header"/>
           <p:cNvSpPr/>
           <p:nvPr/>
         </p:nvSpPr>
@@ -11010,7 +11010,7 @@
       </p:sp>
       <p:sp>
         <p:nvSpPr>
-          <p:cNvPr id="7" name="Shape 4"/>
+          <p:cNvPr id="8" name="Shape 4"/>
           <p:cNvSpPr/>
           <p:nvPr/>
         </p:nvSpPr>
@@ -11033,7 +11033,7 @@
       </p:sp>
       <p:sp>
         <p:nvSpPr>
-          <p:cNvPr id="8" name="Shape 5"/>
+          <p:cNvPr id="9" name="Shape 5"/>
           <p:cNvSpPr/>
           <p:nvPr/>
         </p:nvSpPr>
@@ -11058,7 +11058,7 @@
       </p:sp>
       <p:sp>
         <p:nvSpPr>
-          <p:cNvPr id="9" name="ocean:header"/>
+          <p:cNvPr id="10" name="ocean:header"/>
           <p:cNvSpPr/>
           <p:nvPr/>
         </p:nvSpPr>
@@ -11100,7 +11100,7 @@
       </p:sp>
       <p:sp>
         <p:nvSpPr>
-          <p:cNvPr id="10" name="ocean:header"/>
+          <p:cNvPr id="11" name="ocean:header"/>
           <p:cNvSpPr/>
           <p:nvPr/>
         </p:nvSpPr>
@@ -11142,7 +11142,7 @@
       </p:sp>
       <p:sp>
         <p:nvSpPr>
-          <p:cNvPr id="11" name="ocean:header"/>
+          <p:cNvPr id="12" name="ocean:header"/>
           <p:cNvSpPr/>
           <p:nvPr/>
         </p:nvSpPr>
@@ -11184,7 +11184,7 @@
       </p:sp>
       <p:sp>
         <p:nvSpPr>
-          <p:cNvPr id="12" name="ocean:header"/>
+          <p:cNvPr id="13" name="ocean:header"/>
           <p:cNvSpPr/>
           <p:nvPr/>
         </p:nvSpPr>
@@ -11226,7 +11226,7 @@
       </p:sp>
       <p:sp>
         <p:nvSpPr>
-          <p:cNvPr id="13" name="Shape 10"/>
+          <p:cNvPr id="14" name="Shape 10"/>
           <p:cNvSpPr/>
           <p:nvPr/>
         </p:nvSpPr>
@@ -11249,7 +11249,7 @@
       </p:sp>
       <p:sp>
         <p:nvSpPr>
-          <p:cNvPr id="14" name="ocean:header"/>
+          <p:cNvPr id="15" name="ocean:header"/>
           <p:cNvSpPr/>
           <p:nvPr/>
         </p:nvSpPr>
@@ -11291,7 +11291,7 @@
       </p:sp>
       <p:sp>
         <p:nvSpPr>
-          <p:cNvPr id="15" name="ocean:header"/>
+          <p:cNvPr id="16" name="ocean:header"/>
           <p:cNvSpPr/>
           <p:nvPr/>
         </p:nvSpPr>
@@ -11333,7 +11333,7 @@
       </p:sp>
       <p:sp>
         <p:nvSpPr>
-          <p:cNvPr id="16" name="Shape 13"/>
+          <p:cNvPr id="17" name="Shape 13"/>
           <p:cNvSpPr/>
           <p:nvPr/>
         </p:nvSpPr>
@@ -11356,7 +11356,7 @@
       </p:sp>
       <p:sp>
         <p:nvSpPr>
-          <p:cNvPr id="17" name="Shape 14"/>
+          <p:cNvPr id="18" name="Shape 14"/>
           <p:cNvSpPr/>
           <p:nvPr/>
         </p:nvSpPr>
@@ -11381,7 +11381,7 @@
       </p:sp>
       <p:sp>
         <p:nvSpPr>
-          <p:cNvPr id="18" name="ocean:header"/>
+          <p:cNvPr id="19" name="ocean:header"/>
           <p:cNvSpPr/>
           <p:nvPr/>
         </p:nvSpPr>
@@ -11423,7 +11423,7 @@
       </p:sp>
       <p:sp>
         <p:nvSpPr>
-          <p:cNvPr id="19" name="Shape 16"/>
+          <p:cNvPr id="20" name="Shape 16"/>
           <p:cNvSpPr/>
           <p:nvPr/>
         </p:nvSpPr>
@@ -11446,7 +11446,7 @@
       </p:sp>
       <p:sp>
         <p:nvSpPr>
-          <p:cNvPr id="20" name="ocean:header"/>
+          <p:cNvPr id="21" name="ocean:header"/>
           <p:cNvSpPr/>
           <p:nvPr/>
         </p:nvSpPr>
@@ -11488,7 +11488,7 @@
       </p:sp>
       <p:sp>
         <p:nvSpPr>
-          <p:cNvPr id="21" name="Shape 18"/>
+          <p:cNvPr id="22" name="Shape 18"/>
           <p:cNvSpPr/>
           <p:nvPr/>
         </p:nvSpPr>
@@ -11511,7 +11511,7 @@
       </p:sp>
       <p:sp>
         <p:nvSpPr>
-          <p:cNvPr id="22" name="ocean:header"/>
+          <p:cNvPr id="23" name="ocean:header"/>
           <p:cNvSpPr/>
           <p:nvPr/>
         </p:nvSpPr>
@@ -11553,7 +11553,7 @@
       </p:sp>
       <p:sp>
         <p:nvSpPr>
-          <p:cNvPr id="23" name="Shape 20"/>
+          <p:cNvPr id="24" name="Shape 20"/>
           <p:cNvSpPr/>
           <p:nvPr/>
         </p:nvSpPr>
@@ -11576,7 +11576,7 @@
       </p:sp>
       <p:sp>
         <p:nvSpPr>
-          <p:cNvPr id="24" name="ocean:header"/>
+          <p:cNvPr id="25" name="ocean:header"/>
           <p:cNvSpPr/>
           <p:nvPr/>
         </p:nvSpPr>
@@ -11618,7 +11618,7 @@
       </p:sp>
       <p:sp>
         <p:nvSpPr>
-          <p:cNvPr id="25" name="ocean:label"/>
+          <p:cNvPr id="26" name="ocean:label"/>
           <p:cNvSpPr/>
           <p:nvPr/>
         </p:nvSpPr>
@@ -11660,7 +11660,7 @@
       </p:sp>
       <p:sp>
         <p:nvSpPr>
-          <p:cNvPr id="26" name="ocean:headline"/>
+          <p:cNvPr id="27" name="ocean:headline"/>
           <p:cNvSpPr/>
           <p:nvPr/>
         </p:nvSpPr>
@@ -11722,7 +11722,7 @@
       </p:sp>
       <p:sp>
         <p:nvSpPr>
-          <p:cNvPr id="27" name="ocean:lede"/>
+          <p:cNvPr id="28" name="ocean:lede"/>
           <p:cNvSpPr/>
           <p:nvPr/>
         </p:nvSpPr>
@@ -11804,7 +11804,7 @@
       </p:sp>
       <p:sp>
         <p:nvSpPr>
-          <p:cNvPr id="28" name="Shape 25"/>
+          <p:cNvPr id="29" name="Shape 25"/>
           <p:cNvSpPr/>
           <p:nvPr/>
         </p:nvSpPr>
@@ -11827,7 +11827,7 @@
       </p:sp>
       <p:pic>
         <p:nvPicPr>
-          <p:cNvPr id="29" name="ocean:photo" descr="/home/user/workspace/audit/repo/output/.cache/fit/solar-carport-campus-c5892794287ed22f.jpg">    </p:cNvPr>
+          <p:cNvPr id="30" name="ocean:photo" descr="C:\Users\sctho\OneDrive\Documents\ChatGPT\ocean-brand-system\output\.cache\fit\solar-carport-campus-041d77b11b2a487a.jpg">    </p:cNvPr>
           <p:cNvPicPr>
             <a:picLocks noChangeAspect="1"/>
           </p:cNvPicPr>
@@ -11851,7 +11851,7 @@
       </p:pic>
       <p:sp>
         <p:nvSpPr>
-          <p:cNvPr id="30" name="Shape 26"/>
+          <p:cNvPr id="31" name="Shape 26"/>
           <p:cNvSpPr/>
           <p:nvPr/>
         </p:nvSpPr>
@@ -11876,7 +11876,7 @@
       </p:sp>
       <p:sp>
         <p:nvSpPr>
-          <p:cNvPr id="31" name="ocean:frame"/>
+          <p:cNvPr id="32" name="ocean:frame"/>
           <p:cNvSpPr/>
           <p:nvPr/>
         </p:nvSpPr>
@@ -11937,7 +11937,7 @@
       </p:sp>
       <p:sp>
         <p:nvSpPr>
-          <p:cNvPr id="32" name="Shape 28"/>
+          <p:cNvPr id="33" name="Shape 28"/>
           <p:cNvSpPr/>
           <p:nvPr/>
         </p:nvSpPr>
@@ -11962,7 +11962,7 @@
       </p:sp>
       <p:sp>
         <p:nvSpPr>
-          <p:cNvPr id="33" name="ocean:label"/>
+          <p:cNvPr id="34" name="ocean:label"/>
           <p:cNvSpPr/>
           <p:nvPr/>
         </p:nvSpPr>
@@ -12004,7 +12004,7 @@
       </p:sp>
       <p:sp>
         <p:nvSpPr>
-          <p:cNvPr id="34" name="ocean:body"/>
+          <p:cNvPr id="35" name="ocean:body"/>
           <p:cNvSpPr/>
           <p:nvPr/>
         </p:nvSpPr>
@@ -12046,7 +12046,7 @@
       </p:sp>
       <p:sp>
         <p:nvSpPr>
-          <p:cNvPr id="35" name="ocean:frame"/>
+          <p:cNvPr id="36" name="ocean:frame"/>
           <p:cNvSpPr/>
           <p:nvPr/>
         </p:nvSpPr>
@@ -12107,7 +12107,7 @@
       </p:sp>
       <p:sp>
         <p:nvSpPr>
-          <p:cNvPr id="36" name="Shape 32"/>
+          <p:cNvPr id="37" name="Shape 32"/>
           <p:cNvSpPr/>
           <p:nvPr/>
         </p:nvSpPr>
@@ -12132,7 +12132,7 @@
       </p:sp>
       <p:sp>
         <p:nvSpPr>
-          <p:cNvPr id="37" name="Shape 33"/>
+          <p:cNvPr id="38" name="Shape 33"/>
           <p:cNvSpPr/>
           <p:nvPr/>
         </p:nvSpPr>
@@ -12157,7 +12157,7 @@
       </p:sp>
       <p:sp>
         <p:nvSpPr>
-          <p:cNvPr id="38" name="ocean:label"/>
+          <p:cNvPr id="39" name="ocean:label"/>
           <p:cNvSpPr/>
           <p:nvPr/>
         </p:nvSpPr>
@@ -12199,7 +12199,7 @@
       </p:sp>
       <p:sp>
         <p:nvSpPr>
-          <p:cNvPr id="39" name="ocean:body"/>
+          <p:cNvPr id="40" name="ocean:body"/>
           <p:cNvSpPr/>
           <p:nvPr/>
         </p:nvSpPr>
@@ -12241,7 +12241,7 @@
       </p:sp>
       <p:sp>
         <p:nvSpPr>
-          <p:cNvPr id="40" name="ocean:frame"/>
+          <p:cNvPr id="41" name="ocean:frame"/>
           <p:cNvSpPr/>
           <p:nvPr/>
         </p:nvSpPr>
@@ -12302,7 +12302,7 @@
       </p:sp>
       <p:sp>
         <p:nvSpPr>
-          <p:cNvPr id="41" name="Shape 37"/>
+          <p:cNvPr id="42" name="Shape 37"/>
           <p:cNvSpPr/>
           <p:nvPr/>
         </p:nvSpPr>
@@ -12327,7 +12327,7 @@
       </p:sp>
       <p:sp>
         <p:nvSpPr>
-          <p:cNvPr id="42" name="Shape 38"/>
+          <p:cNvPr id="43" name="Shape 38"/>
           <p:cNvSpPr/>
           <p:nvPr/>
         </p:nvSpPr>
@@ -12352,7 +12352,7 @@
       </p:sp>
       <p:sp>
         <p:nvSpPr>
-          <p:cNvPr id="43" name="Shape 39"/>
+          <p:cNvPr id="44" name="Shape 39"/>
           <p:cNvSpPr/>
           <p:nvPr/>
         </p:nvSpPr>
@@ -12377,7 +12377,7 @@
       </p:sp>
       <p:sp>
         <p:nvSpPr>
-          <p:cNvPr id="44" name="ocean:label"/>
+          <p:cNvPr id="45" name="ocean:label"/>
           <p:cNvSpPr/>
           <p:nvPr/>
         </p:nvSpPr>
@@ -12419,7 +12419,7 @@
       </p:sp>
       <p:sp>
         <p:nvSpPr>
-          <p:cNvPr id="45" name="ocean:body"/>
+          <p:cNvPr id="46" name="ocean:body"/>
           <p:cNvSpPr/>
           <p:nvPr/>
         </p:nvSpPr>
@@ -12461,7 +12461,7 @@
       </p:sp>
       <p:sp>
         <p:nvSpPr>
-          <p:cNvPr id="46" name="ocean:body"/>
+          <p:cNvPr id="47" name="ocean:body"/>
           <p:cNvSpPr/>
           <p:nvPr/>
         </p:nvSpPr>
@@ -12495,7 +12495,7 @@
                 <a:ea typeface="Stack Sans Headline" pitchFamily="34" charset="-122"/>
                 <a:cs typeface="Stack Sans Headline" pitchFamily="34" charset="-120"/>
               </a:rPr>
-              <a:t>Representative image: solar parking structures on a corporate campus.</a:t>
+              <a:t>Ocean project photo: solar parking structures, DJI_0482</a:t>
             </a:r>
             <a:endParaRPr lang="en-US" sz="1200" dirty="0"/>
           </a:p>
@@ -12503,7 +12503,7 @@
       </p:sp>
       <p:sp>
         <p:nvSpPr>
-          <p:cNvPr id="47" name="ocean:footer"/>
+          <p:cNvPr id="48" name="ocean:footer"/>
           <p:cNvSpPr/>
           <p:nvPr/>
         </p:nvSpPr>
@@ -12599,7 +12599,7 @@
       </p:sp>
       <p:pic>
         <p:nvPicPr>
-          <p:cNvPr id="3" name="ocean:logo-horizontal" descr="/home/user/workspace/audit/repo/assets/logos/png/logo_horizontal_peacock.png">    </p:cNvPr>
+          <p:cNvPr id="3" name="ocean:logo-horizontal" descr="C:\Users\sctho\OneDrive\Documents\ChatGPT\ocean-brand-system\assets\logos\png\logo_horizontal_peacock.png">    </p:cNvPr>
           <p:cNvPicPr>
             <a:picLocks noChangeAspect="1"/>
           </p:cNvPicPr>
@@ -14310,7 +14310,7 @@
       </p:grpSpPr>
       <p:pic>
         <p:nvPicPr>
-          <p:cNvPr id="2" name="ocean:environment" descr="/home/user/workspace/audit/repo/assets/environments/env_sprig_map_light_soft.jpg">    </p:cNvPr>
+          <p:cNvPr id="2" name="ocean:environment" descr="C:\Users\sctho\OneDrive\Documents\ChatGPT\ocean-brand-system\assets\environments\env_sprig_map_light_soft.jpg">    </p:cNvPr>
           <p:cNvPicPr>
             <a:picLocks noChangeAspect="1"/>
           </p:cNvPicPr>
@@ -14334,7 +14334,7 @@
       </p:pic>
       <p:pic>
         <p:nvPicPr>
-          <p:cNvPr id="3" name="ocean:logo-graphic" descr="/home/user/workspace/audit/repo/assets/logos/png/logo_graphic_sage.png">    </p:cNvPr>
+          <p:cNvPr id="3" name="ocean:logo-graphic" descr="C:\Users\sctho\OneDrive\Documents\ChatGPT\ocean-brand-system\assets\logos\png\logo_graphic_sage.png">    </p:cNvPr>
           <p:cNvPicPr>
             <a:picLocks noChangeAspect="1"/>
           </p:cNvPicPr>
@@ -14558,7 +14558,7 @@
       </p:sp>
       <p:pic>
         <p:nvPicPr>
-          <p:cNvPr id="3" name="ocean:logo-horizontal" descr="/home/user/workspace/audit/repo/assets/logos/png/logo_horizontal_cedar.png">    </p:cNvPr>
+          <p:cNvPr id="3" name="ocean:logo-horizontal" descr="C:\Users\sctho\OneDrive\Documents\ChatGPT\ocean-brand-system\assets\logos\png\logo_horizontal_cedar.png">    </p:cNvPr>
           <p:cNvPicPr>
             <a:picLocks noChangeAspect="1"/>
           </p:cNvPicPr>
@@ -15486,7 +15486,7 @@
       </p:sp>
       <p:pic>
         <p:nvPicPr>
-          <p:cNvPr id="29" name="ocean:photo" descr="/home/user/workspace/audit/repo/output/.cache/fit/mobility-hub-15c8a0038a3749fc.jpg">    </p:cNvPr>
+          <p:cNvPr id="29" name="ocean:photo" descr="C:\Users\sctho\OneDrive\Documents\ChatGPT\ocean-brand-system\output\.cache\fit\mobility-hub-fafb5dd91e8cd0c4.jpg">    </p:cNvPr>
           <p:cNvPicPr>
             <a:picLocks noChangeAspect="1"/>
           </p:cNvPicPr>
@@ -16503,7 +16503,7 @@
       </p:sp>
       <p:pic>
         <p:nvPicPr>
-          <p:cNvPr id="3" name="ocean:logo-horizontal" descr="/home/user/workspace/audit/repo/assets/logos/png/logo_horizontal_cedar.png">    </p:cNvPr>
+          <p:cNvPr id="3" name="ocean:logo-horizontal" descr="C:\Users\sctho\OneDrive\Documents\ChatGPT\ocean-brand-system\assets\logos\png\logo_horizontal_cedar.png">    </p:cNvPr>
           <p:cNvPicPr>
             <a:picLocks noChangeAspect="1"/>
           </p:cNvPicPr>
@@ -18211,7 +18211,7 @@
       </p:sp>
       <p:pic>
         <p:nvPicPr>
-          <p:cNvPr id="3" name="ocean:logo-horizontal" descr="/home/user/workspace/audit/repo/assets/logos/png/logo_horizontal_cedar.png">    </p:cNvPr>
+          <p:cNvPr id="3" name="ocean:logo-horizontal" descr="C:\Users\sctho\OneDrive\Documents\ChatGPT\ocean-brand-system\assets\logos\png\logo_horizontal_cedar.png">    </p:cNvPr>
           <p:cNvPicPr>
             <a:picLocks noChangeAspect="1"/>
           </p:cNvPicPr>

--- a/output/pptx/ocean-mobility-energy-investor.pptx
+++ b/output/pptx/ocean-mobility-energy-investor.pptx
@@ -957,7 +957,7 @@
           <a:p>
             <a:r>
               <a:rPr lang="en-US" dirty="0"/>
-              <a:t/>
+              <a:t>Monetization follows stabilization: refinance, sell, recapitalize or form joint ventures.</a:t>
             </a:r>
             <a:endParaRPr lang="en-US" dirty="0"/>
           </a:p>
@@ -1837,7 +1837,7 @@
           <a:p>
             <a:r>
               <a:rPr lang="en-US" dirty="0"/>
-              <a:t/>
+              <a:t>Opportunistic equipment: title, condition, serviceability and site fit verified before purchase.</a:t>
             </a:r>
             <a:endParaRPr lang="en-US" dirty="0"/>
           </a:p>
@@ -2212,7 +2212,7 @@
       </p:grpSpPr>
       <p:pic>
         <p:nvPicPr>
-          <p:cNvPr id="2" name="ocean:texture" descr="C:\Users\sctho\OneDrive\Documents\ChatGPT\ocean-brand-system\assets\textures\tex_deck_sage.png">    </p:cNvPr>
+          <p:cNvPr id="2" name="ocean:texture" descr="/home/runner/work/ocean-brand-system/ocean-brand-system/assets/textures/tex_deck_sage.png">    </p:cNvPr>
           <p:cNvPicPr>
             <a:picLocks noChangeAspect="1"/>
           </p:cNvPicPr>
@@ -2294,7 +2294,7 @@
       </p:sp>
       <p:pic>
         <p:nvPicPr>
-          <p:cNvPr id="4" name="ocean:logo-vertical" descr="C:\Users\sctho\OneDrive\Documents\ChatGPT\ocean-brand-system\assets\logos\png\logo_vertical_honeydew.png">    </p:cNvPr>
+          <p:cNvPr id="4" name="ocean:logo-vertical" descr="/home/runner/work/ocean-brand-system/ocean-brand-system/assets/logos/png/logo_vertical_honeydew.png">    </p:cNvPr>
           <p:cNvPicPr>
             <a:picLocks noChangeAspect="1"/>
           </p:cNvPicPr>
@@ -2771,7 +2771,7 @@
       </p:grpSpPr>
       <p:pic>
         <p:nvPicPr>
-          <p:cNvPr id="2" name="ocean:environment" descr="C:\Users\sctho\OneDrive\Documents\ChatGPT\ocean-brand-system\assets\environments\env_olive_map_dark.jpg">    </p:cNvPr>
+          <p:cNvPr id="2" name="ocean:environment" descr="/home/runner/work/ocean-brand-system/ocean-brand-system/assets/environments/env_olive_map_dark.jpg">    </p:cNvPr>
           <p:cNvPicPr>
             <a:picLocks noChangeAspect="1"/>
           </p:cNvPicPr>
@@ -2795,7 +2795,7 @@
       </p:pic>
       <p:pic>
         <p:nvPicPr>
-          <p:cNvPr id="3" name="ocean:logo-graphic" descr="C:\Users\sctho\OneDrive\Documents\ChatGPT\ocean-brand-system\assets\logos\png\logo_graphic_honeydew.png">    </p:cNvPr>
+          <p:cNvPr id="3" name="ocean:logo-graphic" descr="/home/runner/work/ocean-brand-system/ocean-brand-system/assets/logos/png/logo_graphic_honeydew.png">    </p:cNvPr>
           <p:cNvPicPr>
             <a:picLocks noChangeAspect="1"/>
           </p:cNvPicPr>
@@ -3081,7 +3081,7 @@
       </p:sp>
       <p:pic>
         <p:nvPicPr>
-          <p:cNvPr id="3" name="ocean:logo-horizontal" descr="C:\Users\sctho\OneDrive\Documents\ChatGPT\ocean-brand-system\assets\logos\png\logo_horizontal_olive.png">    </p:cNvPr>
+          <p:cNvPr id="3" name="ocean:logo-horizontal" descr="/home/runner/work/ocean-brand-system/ocean-brand-system/assets/logos/png/logo_horizontal_olive.png">    </p:cNvPr>
           <p:cNvPicPr>
             <a:picLocks noChangeAspect="1"/>
           </p:cNvPicPr>
@@ -3924,7 +3924,69 @@
       </p:sp>
       <p:sp>
         <p:nvSpPr>
-          <p:cNvPr id="27" name="Shape 24"/>
+          <p:cNvPr id="27" name="ocean:lede"/>
+          <p:cNvSpPr/>
+          <p:nvPr/>
+        </p:nvSpPr>
+        <p:spPr>
+          <a:xfrm>
+            <a:off x="7040880" y="1572768"/>
+            <a:ext cx="4602175" cy="1042416"/>
+          </a:xfrm>
+          <a:prstGeom prst="rect">
+            <a:avLst/>
+          </a:prstGeom>
+          <a:noFill/>
+          <a:ln/>
+        </p:spPr>
+        <p:txBody>
+          <a:bodyPr wrap="square" lIns="0" tIns="0" rIns="0" bIns="0" rtlCol="0" anchor="b"/>
+          <a:lstStyle/>
+          <a:p>
+            <a:pPr algn="l" indent="0" marL="0">
+              <a:lnSpc>
+                <a:spcPts val="1700"/>
+              </a:lnSpc>
+              <a:buNone/>
+            </a:pPr>
+            <a:r>
+              <a:rPr lang="en-US" sz="1050" b="1" spc="263" kern="0" dirty="0">
+                <a:solidFill>
+                  <a:srgbClr val="6E734C"/>
+                </a:solidFill>
+                <a:latin typeface="Stack Sans Headline" pitchFamily="34" charset="0"/>
+                <a:ea typeface="Stack Sans Headline" pitchFamily="34" charset="-122"/>
+                <a:cs typeface="Stack Sans Headline" pitchFamily="34" charset="-120"/>
+              </a:rPr>
+              <a:t>FORWARD-LOOKING AND SUBJECT TO DILIGENCE;</a:t>
+            </a:r>
+            <a:endParaRPr lang="en-US" sz="1050" dirty="0"/>
+          </a:p>
+          <a:p>
+            <a:pPr algn="l" indent="0" marL="0">
+              <a:lnSpc>
+                <a:spcPts val="1700"/>
+              </a:lnSpc>
+              <a:buNone/>
+            </a:pPr>
+            <a:r>
+              <a:rPr lang="en-US" sz="1050" b="1" spc="263" kern="0" dirty="0">
+                <a:solidFill>
+                  <a:srgbClr val="6E734C"/>
+                </a:solidFill>
+                <a:latin typeface="Stack Sans Headline" pitchFamily="34" charset="0"/>
+                <a:ea typeface="Stack Sans Headline" pitchFamily="34" charset="-122"/>
+                <a:cs typeface="Stack Sans Headline" pitchFamily="34" charset="-120"/>
+              </a:rPr>
+              <a:t>NOT A GUARANTEE OF RETURNS.</a:t>
+            </a:r>
+            <a:endParaRPr lang="en-US" sz="1050" dirty="0"/>
+          </a:p>
+        </p:txBody>
+      </p:sp>
+      <p:sp>
+        <p:nvSpPr>
+          <p:cNvPr id="28" name="Shape 25"/>
           <p:cNvSpPr/>
           <p:nvPr/>
         </p:nvSpPr>
@@ -3947,7 +4009,7 @@
       </p:sp>
       <p:sp>
         <p:nvSpPr>
-          <p:cNvPr id="28" name="ocean:frame"/>
+          <p:cNvPr id="29" name="ocean:frame"/>
           <p:cNvSpPr/>
           <p:nvPr/>
         </p:nvSpPr>
@@ -4008,7 +4070,7 @@
       </p:sp>
       <p:sp>
         <p:nvSpPr>
-          <p:cNvPr id="29" name="Shape 26"/>
+          <p:cNvPr id="30" name="Shape 27"/>
           <p:cNvSpPr/>
           <p:nvPr/>
         </p:nvSpPr>
@@ -4033,7 +4095,7 @@
       </p:sp>
       <p:sp>
         <p:nvSpPr>
-          <p:cNvPr id="30" name="ocean:label"/>
+          <p:cNvPr id="31" name="ocean:label"/>
           <p:cNvSpPr/>
           <p:nvPr/>
         </p:nvSpPr>
@@ -4075,7 +4137,7 @@
       </p:sp>
       <p:sp>
         <p:nvSpPr>
-          <p:cNvPr id="31" name="ocean:section"/>
+          <p:cNvPr id="32" name="ocean:section"/>
           <p:cNvSpPr/>
           <p:nvPr/>
         </p:nvSpPr>
@@ -4117,7 +4179,7 @@
       </p:sp>
       <p:sp>
         <p:nvSpPr>
-          <p:cNvPr id="32" name="ocean:body"/>
+          <p:cNvPr id="33" name="ocean:body"/>
           <p:cNvSpPr/>
           <p:nvPr/>
         </p:nvSpPr>
@@ -4179,7 +4241,7 @@
       </p:sp>
       <p:sp>
         <p:nvSpPr>
-          <p:cNvPr id="33" name="ocean:frame"/>
+          <p:cNvPr id="34" name="ocean:frame"/>
           <p:cNvSpPr/>
           <p:nvPr/>
         </p:nvSpPr>
@@ -4240,7 +4302,7 @@
       </p:sp>
       <p:sp>
         <p:nvSpPr>
-          <p:cNvPr id="34" name="Shape 31"/>
+          <p:cNvPr id="35" name="Shape 32"/>
           <p:cNvSpPr/>
           <p:nvPr/>
         </p:nvSpPr>
@@ -4265,7 +4327,7 @@
       </p:sp>
       <p:sp>
         <p:nvSpPr>
-          <p:cNvPr id="35" name="Shape 32"/>
+          <p:cNvPr id="36" name="Shape 33"/>
           <p:cNvSpPr/>
           <p:nvPr/>
         </p:nvSpPr>
@@ -4290,7 +4352,7 @@
       </p:sp>
       <p:sp>
         <p:nvSpPr>
-          <p:cNvPr id="36" name="ocean:label"/>
+          <p:cNvPr id="37" name="ocean:label"/>
           <p:cNvSpPr/>
           <p:nvPr/>
         </p:nvSpPr>
@@ -4332,7 +4394,7 @@
       </p:sp>
       <p:sp>
         <p:nvSpPr>
-          <p:cNvPr id="37" name="ocean:section"/>
+          <p:cNvPr id="38" name="ocean:section"/>
           <p:cNvSpPr/>
           <p:nvPr/>
         </p:nvSpPr>
@@ -4374,7 +4436,7 @@
       </p:sp>
       <p:sp>
         <p:nvSpPr>
-          <p:cNvPr id="38" name="ocean:body"/>
+          <p:cNvPr id="39" name="ocean:body"/>
           <p:cNvSpPr/>
           <p:nvPr/>
         </p:nvSpPr>
@@ -4436,7 +4498,7 @@
       </p:sp>
       <p:sp>
         <p:nvSpPr>
-          <p:cNvPr id="39" name="ocean:frame"/>
+          <p:cNvPr id="40" name="ocean:frame"/>
           <p:cNvSpPr/>
           <p:nvPr/>
         </p:nvSpPr>
@@ -4497,7 +4559,7 @@
       </p:sp>
       <p:sp>
         <p:nvSpPr>
-          <p:cNvPr id="40" name="Shape 37"/>
+          <p:cNvPr id="41" name="Shape 38"/>
           <p:cNvSpPr/>
           <p:nvPr/>
         </p:nvSpPr>
@@ -4522,7 +4584,7 @@
       </p:sp>
       <p:sp>
         <p:nvSpPr>
-          <p:cNvPr id="41" name="Shape 38"/>
+          <p:cNvPr id="42" name="Shape 39"/>
           <p:cNvSpPr/>
           <p:nvPr/>
         </p:nvSpPr>
@@ -4547,7 +4609,7 @@
       </p:sp>
       <p:sp>
         <p:nvSpPr>
-          <p:cNvPr id="42" name="Shape 39"/>
+          <p:cNvPr id="43" name="Shape 40"/>
           <p:cNvSpPr/>
           <p:nvPr/>
         </p:nvSpPr>
@@ -4572,7 +4634,7 @@
       </p:sp>
       <p:sp>
         <p:nvSpPr>
-          <p:cNvPr id="43" name="ocean:label"/>
+          <p:cNvPr id="44" name="ocean:label"/>
           <p:cNvSpPr/>
           <p:nvPr/>
         </p:nvSpPr>
@@ -4614,7 +4676,7 @@
       </p:sp>
       <p:sp>
         <p:nvSpPr>
-          <p:cNvPr id="44" name="ocean:section"/>
+          <p:cNvPr id="45" name="ocean:section"/>
           <p:cNvSpPr/>
           <p:nvPr/>
         </p:nvSpPr>
@@ -4656,7 +4718,7 @@
       </p:sp>
       <p:sp>
         <p:nvSpPr>
-          <p:cNvPr id="45" name="ocean:body"/>
+          <p:cNvPr id="46" name="ocean:body"/>
           <p:cNvSpPr/>
           <p:nvPr/>
         </p:nvSpPr>
@@ -4772,7 +4834,7 @@
       </p:sp>
       <p:sp>
         <p:nvSpPr>
-          <p:cNvPr id="46" name="ocean:footer"/>
+          <p:cNvPr id="47" name="ocean:footer"/>
           <p:cNvSpPr/>
           <p:nvPr/>
         </p:nvSpPr>
@@ -4868,7 +4930,7 @@
       </p:sp>
       <p:pic>
         <p:nvPicPr>
-          <p:cNvPr id="3" name="ocean:logo-horizontal" descr="C:\Users\sctho\OneDrive\Documents\ChatGPT\ocean-brand-system\assets\logos\png\logo_horizontal_olive.png">    </p:cNvPr>
+          <p:cNvPr id="3" name="ocean:logo-horizontal" descr="/home/runner/work/ocean-brand-system/ocean-brand-system/assets/logos/png/logo_horizontal_olive.png">    </p:cNvPr>
           <p:cNvPicPr>
             <a:picLocks noChangeAspect="1"/>
           </p:cNvPicPr>
@@ -6554,7 +6616,7 @@
       </p:grpSpPr>
       <p:pic>
         <p:nvPicPr>
-          <p:cNvPr id="2" name="ocean:texture" descr="C:\Users\sctho\OneDrive\Documents\ChatGPT\ocean-brand-system\assets\textures\tex_deck_blackmoss.png">    </p:cNvPr>
+          <p:cNvPr id="2" name="ocean:texture" descr="/home/runner/work/ocean-brand-system/ocean-brand-system/assets/textures/tex_deck_blackmoss.png">    </p:cNvPr>
           <p:cNvPicPr>
             <a:picLocks noChangeAspect="1"/>
           </p:cNvPicPr>
@@ -6578,7 +6640,7 @@
       </p:pic>
       <p:pic>
         <p:nvPicPr>
-          <p:cNvPr id="4" name="ocean:logo-graphic" descr="C:\Users\sctho\OneDrive\Documents\ChatGPT\ocean-brand-system\assets\logos\png\logo_graphic_honeydew.png">    </p:cNvPr>
+          <p:cNvPr id="4" name="ocean:logo-graphic" descr="/home/runner/work/ocean-brand-system/ocean-brand-system/assets/logos/png/logo_graphic_honeydew.png">    </p:cNvPr>
           <p:cNvPicPr>
             <a:picLocks noChangeAspect="1"/>
           </p:cNvPicPr>
@@ -7013,7 +7075,7 @@
       </p:grpSpPr>
       <p:sp>
         <p:nvSpPr>
-          <p:cNvPr id="2" name="ocean:header"/>
+          <p:cNvPr id="3" name="ocean:header"/>
           <p:cNvSpPr/>
           <p:nvPr/>
         </p:nvSpPr>
@@ -7035,7 +7097,7 @@
       </p:sp>
       <p:pic>
         <p:nvPicPr>
-          <p:cNvPr id="3" name="ocean:logo-horizontal" descr="C:\Users\sctho\OneDrive\Documents\ChatGPT\ocean-brand-system\assets\logos\png\logo_horizontal_blackmoss.png">    </p:cNvPr>
+          <p:cNvPr id="4" name="ocean:logo-horizontal" descr="/home/runner/work/ocean-brand-system/ocean-brand-system/assets/logos/png/logo_horizontal_blackmoss.png">    </p:cNvPr>
           <p:cNvPicPr>
             <a:picLocks noChangeAspect="1"/>
           </p:cNvPicPr>
@@ -7059,7 +7121,7 @@
       </p:pic>
       <p:sp>
         <p:nvSpPr>
-          <p:cNvPr id="4" name="Shape 1"/>
+          <p:cNvPr id="5" name="Shape 1"/>
           <p:cNvSpPr/>
           <p:nvPr/>
         </p:nvSpPr>
@@ -7082,7 +7144,7 @@
       </p:sp>
       <p:sp>
         <p:nvSpPr>
-          <p:cNvPr id="5" name="ocean:header"/>
+          <p:cNvPr id="6" name="ocean:header"/>
           <p:cNvSpPr/>
           <p:nvPr/>
         </p:nvSpPr>
@@ -7124,7 +7186,7 @@
       </p:sp>
       <p:sp>
         <p:nvSpPr>
-          <p:cNvPr id="6" name="ocean:header"/>
+          <p:cNvPr id="7" name="ocean:header"/>
           <p:cNvSpPr/>
           <p:nvPr/>
         </p:nvSpPr>
@@ -7166,7 +7228,7 @@
       </p:sp>
       <p:sp>
         <p:nvSpPr>
-          <p:cNvPr id="7" name="Shape 4"/>
+          <p:cNvPr id="8" name="Shape 4"/>
           <p:cNvSpPr/>
           <p:nvPr/>
         </p:nvSpPr>
@@ -7189,7 +7251,7 @@
       </p:sp>
       <p:sp>
         <p:nvSpPr>
-          <p:cNvPr id="8" name="ocean:header"/>
+          <p:cNvPr id="9" name="ocean:header"/>
           <p:cNvSpPr/>
           <p:nvPr/>
         </p:nvSpPr>
@@ -7231,7 +7293,7 @@
       </p:sp>
       <p:sp>
         <p:nvSpPr>
-          <p:cNvPr id="9" name="ocean:header"/>
+          <p:cNvPr id="10" name="ocean:header"/>
           <p:cNvSpPr/>
           <p:nvPr/>
         </p:nvSpPr>
@@ -7273,7 +7335,7 @@
       </p:sp>
       <p:sp>
         <p:nvSpPr>
-          <p:cNvPr id="10" name="ocean:header"/>
+          <p:cNvPr id="11" name="ocean:header"/>
           <p:cNvSpPr/>
           <p:nvPr/>
         </p:nvSpPr>
@@ -7315,7 +7377,7 @@
       </p:sp>
       <p:sp>
         <p:nvSpPr>
-          <p:cNvPr id="11" name="Shape 8"/>
+          <p:cNvPr id="12" name="Shape 8"/>
           <p:cNvSpPr/>
           <p:nvPr/>
         </p:nvSpPr>
@@ -7340,7 +7402,7 @@
       </p:sp>
       <p:sp>
         <p:nvSpPr>
-          <p:cNvPr id="12" name="ocean:header"/>
+          <p:cNvPr id="13" name="ocean:header"/>
           <p:cNvSpPr/>
           <p:nvPr/>
         </p:nvSpPr>
@@ -7382,7 +7444,7 @@
       </p:sp>
       <p:sp>
         <p:nvSpPr>
-          <p:cNvPr id="13" name="Shape 10"/>
+          <p:cNvPr id="14" name="Shape 10"/>
           <p:cNvSpPr/>
           <p:nvPr/>
         </p:nvSpPr>
@@ -7405,7 +7467,7 @@
       </p:sp>
       <p:sp>
         <p:nvSpPr>
-          <p:cNvPr id="14" name="ocean:header"/>
+          <p:cNvPr id="15" name="ocean:header"/>
           <p:cNvSpPr/>
           <p:nvPr/>
         </p:nvSpPr>
@@ -7447,7 +7509,7 @@
       </p:sp>
       <p:sp>
         <p:nvSpPr>
-          <p:cNvPr id="15" name="ocean:header"/>
+          <p:cNvPr id="16" name="ocean:header"/>
           <p:cNvSpPr/>
           <p:nvPr/>
         </p:nvSpPr>
@@ -7489,7 +7551,7 @@
       </p:sp>
       <p:sp>
         <p:nvSpPr>
-          <p:cNvPr id="16" name="Shape 13"/>
+          <p:cNvPr id="17" name="Shape 13"/>
           <p:cNvSpPr/>
           <p:nvPr/>
         </p:nvSpPr>
@@ -7512,7 +7574,7 @@
       </p:sp>
       <p:sp>
         <p:nvSpPr>
-          <p:cNvPr id="17" name="ocean:header"/>
+          <p:cNvPr id="18" name="ocean:header"/>
           <p:cNvSpPr/>
           <p:nvPr/>
         </p:nvSpPr>
@@ -7554,7 +7616,7 @@
       </p:sp>
       <p:sp>
         <p:nvSpPr>
-          <p:cNvPr id="18" name="Shape 15"/>
+          <p:cNvPr id="19" name="Shape 15"/>
           <p:cNvSpPr/>
           <p:nvPr/>
         </p:nvSpPr>
@@ -7577,7 +7639,7 @@
       </p:sp>
       <p:sp>
         <p:nvSpPr>
-          <p:cNvPr id="19" name="ocean:header"/>
+          <p:cNvPr id="20" name="ocean:header"/>
           <p:cNvSpPr/>
           <p:nvPr/>
         </p:nvSpPr>
@@ -7619,7 +7681,7 @@
       </p:sp>
       <p:sp>
         <p:nvSpPr>
-          <p:cNvPr id="20" name="Shape 17"/>
+          <p:cNvPr id="21" name="Shape 17"/>
           <p:cNvSpPr/>
           <p:nvPr/>
         </p:nvSpPr>
@@ -7642,7 +7704,7 @@
       </p:sp>
       <p:sp>
         <p:nvSpPr>
-          <p:cNvPr id="21" name="ocean:header"/>
+          <p:cNvPr id="22" name="ocean:header"/>
           <p:cNvSpPr/>
           <p:nvPr/>
         </p:nvSpPr>
@@ -7684,7 +7746,7 @@
       </p:sp>
       <p:sp>
         <p:nvSpPr>
-          <p:cNvPr id="22" name="Shape 19"/>
+          <p:cNvPr id="23" name="Shape 19"/>
           <p:cNvSpPr/>
           <p:nvPr/>
         </p:nvSpPr>
@@ -7707,7 +7769,7 @@
       </p:sp>
       <p:sp>
         <p:nvSpPr>
-          <p:cNvPr id="23" name="Shape 20"/>
+          <p:cNvPr id="24" name="Shape 20"/>
           <p:cNvSpPr/>
           <p:nvPr/>
         </p:nvSpPr>
@@ -7732,7 +7794,7 @@
       </p:sp>
       <p:sp>
         <p:nvSpPr>
-          <p:cNvPr id="24" name="ocean:header"/>
+          <p:cNvPr id="25" name="ocean:header"/>
           <p:cNvSpPr/>
           <p:nvPr/>
         </p:nvSpPr>
@@ -7774,7 +7836,7 @@
       </p:sp>
       <p:sp>
         <p:nvSpPr>
-          <p:cNvPr id="25" name="ocean:label"/>
+          <p:cNvPr id="26" name="ocean:label"/>
           <p:cNvSpPr/>
           <p:nvPr/>
         </p:nvSpPr>
@@ -7816,7 +7878,7 @@
       </p:sp>
       <p:sp>
         <p:nvSpPr>
-          <p:cNvPr id="26" name="ocean:headline"/>
+          <p:cNvPr id="27" name="ocean:headline"/>
           <p:cNvSpPr/>
           <p:nvPr/>
         </p:nvSpPr>
@@ -7858,7 +7920,7 @@
       </p:sp>
       <p:sp>
         <p:nvSpPr>
-          <p:cNvPr id="27" name="ocean:lede"/>
+          <p:cNvPr id="28" name="ocean:lede"/>
           <p:cNvSpPr/>
           <p:nvPr/>
         </p:nvSpPr>
@@ -7892,7 +7954,7 @@
                 <a:ea typeface="Stack Sans Headline" pitchFamily="34" charset="-122"/>
                 <a:cs typeface="Stack Sans Headline" pitchFamily="34" charset="-120"/>
               </a:rPr>
-              <a:t>MONETIZATION FOLLOWS STABILIZATION:</a:t>
+              <a:t>FORWARD-LOOKING AND SUBJECT TO DILIGENCE;</a:t>
             </a:r>
             <a:endParaRPr lang="en-US" sz="1050" dirty="0"/>
           </a:p>
@@ -7912,35 +7974,15 @@
                 <a:ea typeface="Stack Sans Headline" pitchFamily="34" charset="-122"/>
                 <a:cs typeface="Stack Sans Headline" pitchFamily="34" charset="-120"/>
               </a:rPr>
-              <a:t>REFINANCE, SELL, RECAPITALIZE OR FORM JOINT</a:t>
+              <a:t>NOT A GUARANTEE OF RETURNS.</a:t>
             </a:r>
             <a:endParaRPr lang="en-US" sz="1050" dirty="0"/>
           </a:p>
-          <a:p>
-            <a:pPr algn="l" indent="0" marL="0">
-              <a:lnSpc>
-                <a:spcPts val="1700"/>
-              </a:lnSpc>
-              <a:buNone/>
-            </a:pPr>
-            <a:r>
-              <a:rPr lang="en-US" sz="1050" b="1" spc="263" kern="0" dirty="0">
-                <a:solidFill>
-                  <a:srgbClr val="0B1617"/>
-                </a:solidFill>
-                <a:latin typeface="Stack Sans Headline" pitchFamily="34" charset="0"/>
-                <a:ea typeface="Stack Sans Headline" pitchFamily="34" charset="-122"/>
-                <a:cs typeface="Stack Sans Headline" pitchFamily="34" charset="-120"/>
-              </a:rPr>
-              <a:t>VENTURES.</a:t>
-            </a:r>
-            <a:endParaRPr lang="en-US" sz="1050" dirty="0"/>
-          </a:p>
-        </p:txBody>
-      </p:sp>
-      <p:sp>
-        <p:nvSpPr>
-          <p:cNvPr id="28" name="Shape 25"/>
+        </p:txBody>
+      </p:sp>
+      <p:sp>
+        <p:nvSpPr>
+          <p:cNvPr id="29" name="Shape 25"/>
           <p:cNvSpPr/>
           <p:nvPr/>
         </p:nvSpPr>
@@ -7963,7 +8005,7 @@
       </p:sp>
       <p:sp>
         <p:nvSpPr>
-          <p:cNvPr id="29" name="ocean:label"/>
+          <p:cNvPr id="30" name="ocean:label"/>
           <p:cNvSpPr/>
           <p:nvPr/>
         </p:nvSpPr>
@@ -8005,7 +8047,7 @@
       </p:sp>
       <p:sp>
         <p:nvSpPr>
-          <p:cNvPr id="30" name="ocean:metric"/>
+          <p:cNvPr id="31" name="ocean:metric"/>
           <p:cNvSpPr/>
           <p:nvPr/>
         </p:nvSpPr>
@@ -8047,7 +8089,7 @@
       </p:sp>
       <p:sp>
         <p:nvSpPr>
-          <p:cNvPr id="31" name="Shape 28"/>
+          <p:cNvPr id="32" name="Shape 28"/>
           <p:cNvSpPr/>
           <p:nvPr/>
         </p:nvSpPr>
@@ -8070,7 +8112,7 @@
       </p:sp>
       <p:sp>
         <p:nvSpPr>
-          <p:cNvPr id="32" name="ocean:body"/>
+          <p:cNvPr id="33" name="ocean:body"/>
           <p:cNvSpPr/>
           <p:nvPr/>
         </p:nvSpPr>
@@ -8112,7 +8154,7 @@
       </p:sp>
       <p:sp>
         <p:nvSpPr>
-          <p:cNvPr id="33" name="ocean:body"/>
+          <p:cNvPr id="34" name="ocean:body"/>
           <p:cNvSpPr/>
           <p:nvPr/>
         </p:nvSpPr>
@@ -8154,7 +8196,7 @@
       </p:sp>
       <p:sp>
         <p:nvSpPr>
-          <p:cNvPr id="34" name="Shape 31"/>
+          <p:cNvPr id="35" name="Shape 31"/>
           <p:cNvSpPr/>
           <p:nvPr/>
         </p:nvSpPr>
@@ -8177,7 +8219,7 @@
       </p:sp>
       <p:sp>
         <p:nvSpPr>
-          <p:cNvPr id="35" name="ocean:body"/>
+          <p:cNvPr id="36" name="ocean:body"/>
           <p:cNvSpPr/>
           <p:nvPr/>
         </p:nvSpPr>
@@ -8219,7 +8261,7 @@
       </p:sp>
       <p:sp>
         <p:nvSpPr>
-          <p:cNvPr id="36" name="ocean:body"/>
+          <p:cNvPr id="37" name="ocean:body"/>
           <p:cNvSpPr/>
           <p:nvPr/>
         </p:nvSpPr>
@@ -8261,7 +8303,7 @@
       </p:sp>
       <p:sp>
         <p:nvSpPr>
-          <p:cNvPr id="37" name="ocean:frame"/>
+          <p:cNvPr id="38" name="ocean:frame"/>
           <p:cNvSpPr/>
           <p:nvPr/>
         </p:nvSpPr>
@@ -8322,7 +8364,7 @@
       </p:sp>
       <p:sp>
         <p:nvSpPr>
-          <p:cNvPr id="38" name="Shape 35"/>
+          <p:cNvPr id="39" name="Shape 35"/>
           <p:cNvSpPr/>
           <p:nvPr/>
         </p:nvSpPr>
@@ -8347,7 +8389,7 @@
       </p:sp>
       <p:sp>
         <p:nvSpPr>
-          <p:cNvPr id="39" name="ocean:label"/>
+          <p:cNvPr id="40" name="ocean:label"/>
           <p:cNvSpPr/>
           <p:nvPr/>
         </p:nvSpPr>
@@ -8389,7 +8431,7 @@
       </p:sp>
       <p:sp>
         <p:nvSpPr>
-          <p:cNvPr id="40" name="ocean:body"/>
+          <p:cNvPr id="41" name="ocean:body"/>
           <p:cNvSpPr/>
           <p:nvPr/>
         </p:nvSpPr>
@@ -8431,7 +8473,7 @@
       </p:sp>
       <p:sp>
         <p:nvSpPr>
-          <p:cNvPr id="41" name="ocean:frame"/>
+          <p:cNvPr id="42" name="ocean:frame"/>
           <p:cNvSpPr/>
           <p:nvPr/>
         </p:nvSpPr>
@@ -8492,7 +8534,7 @@
       </p:sp>
       <p:sp>
         <p:nvSpPr>
-          <p:cNvPr id="42" name="Shape 39"/>
+          <p:cNvPr id="43" name="Shape 39"/>
           <p:cNvSpPr/>
           <p:nvPr/>
         </p:nvSpPr>
@@ -8517,7 +8559,7 @@
       </p:sp>
       <p:sp>
         <p:nvSpPr>
-          <p:cNvPr id="43" name="Shape 40"/>
+          <p:cNvPr id="44" name="Shape 40"/>
           <p:cNvSpPr/>
           <p:nvPr/>
         </p:nvSpPr>
@@ -8542,7 +8584,7 @@
       </p:sp>
       <p:sp>
         <p:nvSpPr>
-          <p:cNvPr id="44" name="ocean:label"/>
+          <p:cNvPr id="45" name="ocean:label"/>
           <p:cNvSpPr/>
           <p:nvPr/>
         </p:nvSpPr>
@@ -8584,7 +8626,7 @@
       </p:sp>
       <p:sp>
         <p:nvSpPr>
-          <p:cNvPr id="45" name="ocean:body"/>
+          <p:cNvPr id="46" name="ocean:body"/>
           <p:cNvSpPr/>
           <p:nvPr/>
         </p:nvSpPr>
@@ -8626,7 +8668,7 @@
       </p:sp>
       <p:sp>
         <p:nvSpPr>
-          <p:cNvPr id="46" name="ocean:frame"/>
+          <p:cNvPr id="47" name="ocean:frame"/>
           <p:cNvSpPr/>
           <p:nvPr/>
         </p:nvSpPr>
@@ -8687,7 +8729,7 @@
       </p:sp>
       <p:sp>
         <p:nvSpPr>
-          <p:cNvPr id="47" name="Shape 44"/>
+          <p:cNvPr id="48" name="Shape 44"/>
           <p:cNvSpPr/>
           <p:nvPr/>
         </p:nvSpPr>
@@ -8712,7 +8754,7 @@
       </p:sp>
       <p:sp>
         <p:nvSpPr>
-          <p:cNvPr id="48" name="Shape 45"/>
+          <p:cNvPr id="49" name="Shape 45"/>
           <p:cNvSpPr/>
           <p:nvPr/>
         </p:nvSpPr>
@@ -8737,7 +8779,7 @@
       </p:sp>
       <p:sp>
         <p:nvSpPr>
-          <p:cNvPr id="49" name="Shape 46"/>
+          <p:cNvPr id="50" name="Shape 46"/>
           <p:cNvSpPr/>
           <p:nvPr/>
         </p:nvSpPr>
@@ -8762,7 +8804,7 @@
       </p:sp>
       <p:sp>
         <p:nvSpPr>
-          <p:cNvPr id="50" name="ocean:label"/>
+          <p:cNvPr id="51" name="ocean:label"/>
           <p:cNvSpPr/>
           <p:nvPr/>
         </p:nvSpPr>
@@ -8804,7 +8846,7 @@
       </p:sp>
       <p:sp>
         <p:nvSpPr>
-          <p:cNvPr id="51" name="ocean:body"/>
+          <p:cNvPr id="52" name="ocean:body"/>
           <p:cNvSpPr/>
           <p:nvPr/>
         </p:nvSpPr>
@@ -8846,7 +8888,7 @@
       </p:sp>
       <p:sp>
         <p:nvSpPr>
-          <p:cNvPr id="52" name="ocean:frame"/>
+          <p:cNvPr id="53" name="ocean:frame"/>
           <p:cNvSpPr/>
           <p:nvPr/>
         </p:nvSpPr>
@@ -8907,7 +8949,7 @@
       </p:sp>
       <p:sp>
         <p:nvSpPr>
-          <p:cNvPr id="53" name="Shape 50"/>
+          <p:cNvPr id="54" name="Shape 50"/>
           <p:cNvSpPr/>
           <p:nvPr/>
         </p:nvSpPr>
@@ -8932,7 +8974,7 @@
       </p:sp>
       <p:sp>
         <p:nvSpPr>
-          <p:cNvPr id="54" name="Shape 51"/>
+          <p:cNvPr id="55" name="Shape 51"/>
           <p:cNvSpPr/>
           <p:nvPr/>
         </p:nvSpPr>
@@ -8957,7 +8999,7 @@
       </p:sp>
       <p:sp>
         <p:nvSpPr>
-          <p:cNvPr id="55" name="Shape 52"/>
+          <p:cNvPr id="56" name="Shape 52"/>
           <p:cNvSpPr/>
           <p:nvPr/>
         </p:nvSpPr>
@@ -8982,7 +9024,7 @@
       </p:sp>
       <p:sp>
         <p:nvSpPr>
-          <p:cNvPr id="56" name="Shape 53"/>
+          <p:cNvPr id="57" name="Shape 53"/>
           <p:cNvSpPr/>
           <p:nvPr/>
         </p:nvSpPr>
@@ -9007,7 +9049,7 @@
       </p:sp>
       <p:sp>
         <p:nvSpPr>
-          <p:cNvPr id="57" name="ocean:label"/>
+          <p:cNvPr id="58" name="ocean:label"/>
           <p:cNvSpPr/>
           <p:nvPr/>
         </p:nvSpPr>
@@ -9049,7 +9091,7 @@
       </p:sp>
       <p:sp>
         <p:nvSpPr>
-          <p:cNvPr id="58" name="ocean:body"/>
+          <p:cNvPr id="59" name="ocean:body"/>
           <p:cNvSpPr/>
           <p:nvPr/>
         </p:nvSpPr>
@@ -9091,7 +9133,7 @@
       </p:sp>
       <p:sp>
         <p:nvSpPr>
-          <p:cNvPr id="59" name="ocean:footer"/>
+          <p:cNvPr id="60" name="ocean:footer"/>
           <p:cNvSpPr/>
           <p:nvPr/>
         </p:nvSpPr>
@@ -9165,7 +9207,7 @@
       </p:grpSpPr>
       <p:pic>
         <p:nvPicPr>
-          <p:cNvPr id="2" name="ocean:logo-graphic" descr="C:\Users\sctho\OneDrive\Documents\ChatGPT\ocean-brand-system\assets\logos\png\logo_graphic_blackmoss.png">    </p:cNvPr>
+          <p:cNvPr id="2" name="ocean:logo-graphic" descr="/home/runner/work/ocean-brand-system/ocean-brand-system/assets/logos/png/logo_graphic_blackmoss.png">    </p:cNvPr>
           <p:cNvPicPr>
             <a:picLocks noChangeAspect="1"/>
           </p:cNvPicPr>
@@ -9641,7 +9683,7 @@
       </p:grpSpPr>
       <p:pic>
         <p:nvPicPr>
-          <p:cNvPr id="2" name="ocean:texture" descr="C:\Users\sctho\OneDrive\Documents\ChatGPT\ocean-brand-system\assets\textures\tex_deck_sage.png">    </p:cNvPr>
+          <p:cNvPr id="2" name="ocean:texture" descr="/home/runner/work/ocean-brand-system/ocean-brand-system/assets/textures/tex_deck_sage.png">    </p:cNvPr>
           <p:cNvPicPr>
             <a:picLocks noChangeAspect="1"/>
           </p:cNvPicPr>
@@ -9665,7 +9707,7 @@
       </p:pic>
       <p:pic>
         <p:nvPicPr>
-          <p:cNvPr id="3" name="ocean:logo-vertical" descr="C:\Users\sctho\OneDrive\Documents\ChatGPT\ocean-brand-system\assets\logos\png\logo_vertical_honeydew.png">    </p:cNvPr>
+          <p:cNvPr id="3" name="ocean:logo-vertical" descr="/home/runner/work/ocean-brand-system/ocean-brand-system/assets/logos/png/logo_vertical_honeydew.png">    </p:cNvPr>
           <p:cNvPicPr>
             <a:picLocks noChangeAspect="1"/>
           </p:cNvPicPr>
@@ -9721,7 +9763,7 @@
       </p:grpSpPr>
       <p:pic>
         <p:nvPicPr>
-          <p:cNvPr id="2" name="ocean:logo-horizontal" descr="C:\Users\sctho\OneDrive\Documents\ChatGPT\ocean-brand-system\assets\logos\png\logo_horizontal_blackmoss.png">    </p:cNvPr>
+          <p:cNvPr id="2" name="ocean:logo-horizontal" descr="/home/runner/work/ocean-brand-system/ocean-brand-system/assets/logos/png/logo_horizontal_blackmoss.png">    </p:cNvPr>
           <p:cNvPicPr>
             <a:picLocks noChangeAspect="1"/>
           </p:cNvPicPr>
@@ -10589,7 +10631,7 @@
       </p:grpSpPr>
       <p:pic>
         <p:nvPicPr>
-          <p:cNvPr id="2" name="ocean:environment" descr="C:\Users\sctho\OneDrive\Documents\ChatGPT\ocean-brand-system\assets\environments\env_peacock_map_light.jpg">    </p:cNvPr>
+          <p:cNvPr id="2" name="ocean:environment" descr="/home/runner/work/ocean-brand-system/ocean-brand-system/assets/environments/env_peacock_map_light.jpg">    </p:cNvPr>
           <p:cNvPicPr>
             <a:picLocks noChangeAspect="1"/>
           </p:cNvPicPr>
@@ -10613,7 +10655,7 @@
       </p:pic>
       <p:pic>
         <p:nvPicPr>
-          <p:cNvPr id="3" name="ocean:logo-graphic" descr="C:\Users\sctho\OneDrive\Documents\ChatGPT\ocean-brand-system\assets\logos\png\logo_graphic_honeydew.png">    </p:cNvPr>
+          <p:cNvPr id="3" name="ocean:logo-graphic" descr="/home/runner/work/ocean-brand-system/ocean-brand-system/assets/logos/png/logo_graphic_honeydew.png">    </p:cNvPr>
           <p:cNvPicPr>
             <a:picLocks noChangeAspect="1"/>
           </p:cNvPicPr>
@@ -10879,7 +10921,7 @@
       </p:sp>
       <p:pic>
         <p:nvPicPr>
-          <p:cNvPr id="4" name="ocean:logo-horizontal" descr="C:\Users\sctho\OneDrive\Documents\ChatGPT\ocean-brand-system\assets\logos\png\logo_horizontal_peacock.png">    </p:cNvPr>
+          <p:cNvPr id="4" name="ocean:logo-horizontal" descr="/home/runner/work/ocean-brand-system/ocean-brand-system/assets/logos/png/logo_horizontal_peacock.png">    </p:cNvPr>
           <p:cNvPicPr>
             <a:picLocks noChangeAspect="1"/>
           </p:cNvPicPr>
@@ -11827,7 +11869,7 @@
       </p:sp>
       <p:pic>
         <p:nvPicPr>
-          <p:cNvPr id="30" name="ocean:photo" descr="C:\Users\sctho\OneDrive\Documents\ChatGPT\ocean-brand-system\output\.cache\fit\solar-carport-campus-041d77b11b2a487a.jpg">    </p:cNvPr>
+          <p:cNvPr id="30" name="ocean:photo" descr="/home/runner/work/ocean-brand-system/ocean-brand-system/output/.cache/fit/solar-carport-campus-643b6b4ed5e83ee1.jpg">    </p:cNvPr>
           <p:cNvPicPr>
             <a:picLocks noChangeAspect="1"/>
           </p:cNvPicPr>
@@ -12599,7 +12641,7 @@
       </p:sp>
       <p:pic>
         <p:nvPicPr>
-          <p:cNvPr id="3" name="ocean:logo-horizontal" descr="C:\Users\sctho\OneDrive\Documents\ChatGPT\ocean-brand-system\assets\logos\png\logo_horizontal_peacock.png">    </p:cNvPr>
+          <p:cNvPr id="3" name="ocean:logo-horizontal" descr="/home/runner/work/ocean-brand-system/ocean-brand-system/assets/logos/png/logo_horizontal_peacock.png">    </p:cNvPr>
           <p:cNvPicPr>
             <a:picLocks noChangeAspect="1"/>
           </p:cNvPicPr>
@@ -14310,7 +14352,7 @@
       </p:grpSpPr>
       <p:pic>
         <p:nvPicPr>
-          <p:cNvPr id="2" name="ocean:environment" descr="C:\Users\sctho\OneDrive\Documents\ChatGPT\ocean-brand-system\assets\environments\env_sprig_map_light_soft.jpg">    </p:cNvPr>
+          <p:cNvPr id="2" name="ocean:environment" descr="/home/runner/work/ocean-brand-system/ocean-brand-system/assets/environments/env_sprig_map_light_soft.jpg">    </p:cNvPr>
           <p:cNvPicPr>
             <a:picLocks noChangeAspect="1"/>
           </p:cNvPicPr>
@@ -14334,7 +14376,7 @@
       </p:pic>
       <p:pic>
         <p:nvPicPr>
-          <p:cNvPr id="3" name="ocean:logo-graphic" descr="C:\Users\sctho\OneDrive\Documents\ChatGPT\ocean-brand-system\assets\logos\png\logo_graphic_sage.png">    </p:cNvPr>
+          <p:cNvPr id="3" name="ocean:logo-graphic" descr="/home/runner/work/ocean-brand-system/ocean-brand-system/assets/logos/png/logo_graphic_sage.png">    </p:cNvPr>
           <p:cNvPicPr>
             <a:picLocks noChangeAspect="1"/>
           </p:cNvPicPr>
@@ -14558,7 +14600,7 @@
       </p:sp>
       <p:pic>
         <p:nvPicPr>
-          <p:cNvPr id="3" name="ocean:logo-horizontal" descr="C:\Users\sctho\OneDrive\Documents\ChatGPT\ocean-brand-system\assets\logos\png\logo_horizontal_cedar.png">    </p:cNvPr>
+          <p:cNvPr id="3" name="ocean:logo-horizontal" descr="/home/runner/work/ocean-brand-system/ocean-brand-system/assets/logos/png/logo_horizontal_cedar.png">    </p:cNvPr>
           <p:cNvPicPr>
             <a:picLocks noChangeAspect="1"/>
           </p:cNvPicPr>
@@ -15486,7 +15528,7 @@
       </p:sp>
       <p:pic>
         <p:nvPicPr>
-          <p:cNvPr id="29" name="ocean:photo" descr="C:\Users\sctho\OneDrive\Documents\ChatGPT\ocean-brand-system\output\.cache\fit\mobility-hub-fafb5dd91e8cd0c4.jpg">    </p:cNvPr>
+          <p:cNvPr id="29" name="ocean:photo" descr="/home/runner/work/ocean-brand-system/ocean-brand-system/output/.cache/fit/mobility-hub-c51f2fa0acaa1a17.jpg">    </p:cNvPr>
           <p:cNvPicPr>
             <a:picLocks noChangeAspect="1"/>
           </p:cNvPicPr>
@@ -16399,7 +16441,7 @@
                 <a:ea typeface="Stack Sans Headline" pitchFamily="34" charset="-122"/>
                 <a:cs typeface="Stack Sans Headline" pitchFamily="34" charset="-120"/>
               </a:rPr>
-              <a:t>Representative image: infrastructure concept, not an Ocean site.</a:t>
+              <a:t>Representative image: infrastructure concept, not an Ocean site</a:t>
             </a:r>
             <a:endParaRPr lang="en-US" sz="1200" dirty="0"/>
           </a:p>
@@ -16503,7 +16545,7 @@
       </p:sp>
       <p:pic>
         <p:nvPicPr>
-          <p:cNvPr id="3" name="ocean:logo-horizontal" descr="C:\Users\sctho\OneDrive\Documents\ChatGPT\ocean-brand-system\assets\logos\png\logo_horizontal_cedar.png">    </p:cNvPr>
+          <p:cNvPr id="3" name="ocean:logo-horizontal" descr="/home/runner/work/ocean-brand-system/ocean-brand-system/assets/logos/png/logo_horizontal_cedar.png">    </p:cNvPr>
           <p:cNvPicPr>
             <a:picLocks noChangeAspect="1"/>
           </p:cNvPicPr>
@@ -18189,7 +18231,7 @@
       </p:grpSpPr>
       <p:sp>
         <p:nvSpPr>
-          <p:cNvPr id="2" name="ocean:header"/>
+          <p:cNvPr id="3" name="ocean:header"/>
           <p:cNvSpPr/>
           <p:nvPr/>
         </p:nvSpPr>
@@ -18211,7 +18253,7 @@
       </p:sp>
       <p:pic>
         <p:nvPicPr>
-          <p:cNvPr id="3" name="ocean:logo-horizontal" descr="C:\Users\sctho\OneDrive\Documents\ChatGPT\ocean-brand-system\assets\logos\png\logo_horizontal_cedar.png">    </p:cNvPr>
+          <p:cNvPr id="4" name="ocean:logo-horizontal" descr="/home/runner/work/ocean-brand-system/ocean-brand-system/assets/logos/png/logo_horizontal_cedar.png">    </p:cNvPr>
           <p:cNvPicPr>
             <a:picLocks noChangeAspect="1"/>
           </p:cNvPicPr>
@@ -18235,7 +18277,7 @@
       </p:pic>
       <p:sp>
         <p:nvSpPr>
-          <p:cNvPr id="4" name="Shape 1"/>
+          <p:cNvPr id="5" name="Shape 1"/>
           <p:cNvSpPr/>
           <p:nvPr/>
         </p:nvSpPr>
@@ -18258,7 +18300,7 @@
       </p:sp>
       <p:sp>
         <p:nvSpPr>
-          <p:cNvPr id="5" name="ocean:header"/>
+          <p:cNvPr id="6" name="ocean:header"/>
           <p:cNvSpPr/>
           <p:nvPr/>
         </p:nvSpPr>
@@ -18300,7 +18342,7 @@
       </p:sp>
       <p:sp>
         <p:nvSpPr>
-          <p:cNvPr id="6" name="ocean:header"/>
+          <p:cNvPr id="7" name="ocean:header"/>
           <p:cNvSpPr/>
           <p:nvPr/>
         </p:nvSpPr>
@@ -18342,7 +18384,7 @@
       </p:sp>
       <p:sp>
         <p:nvSpPr>
-          <p:cNvPr id="7" name="Shape 4"/>
+          <p:cNvPr id="8" name="Shape 4"/>
           <p:cNvSpPr/>
           <p:nvPr/>
         </p:nvSpPr>
@@ -18365,7 +18407,7 @@
       </p:sp>
       <p:sp>
         <p:nvSpPr>
-          <p:cNvPr id="8" name="ocean:header"/>
+          <p:cNvPr id="9" name="ocean:header"/>
           <p:cNvSpPr/>
           <p:nvPr/>
         </p:nvSpPr>
@@ -18407,7 +18449,7 @@
       </p:sp>
       <p:sp>
         <p:nvSpPr>
-          <p:cNvPr id="9" name="Shape 6"/>
+          <p:cNvPr id="10" name="Shape 6"/>
           <p:cNvSpPr/>
           <p:nvPr/>
         </p:nvSpPr>
@@ -18432,7 +18474,7 @@
       </p:sp>
       <p:sp>
         <p:nvSpPr>
-          <p:cNvPr id="10" name="ocean:header"/>
+          <p:cNvPr id="11" name="ocean:header"/>
           <p:cNvSpPr/>
           <p:nvPr/>
         </p:nvSpPr>
@@ -18474,7 +18516,7 @@
       </p:sp>
       <p:sp>
         <p:nvSpPr>
-          <p:cNvPr id="11" name="ocean:header"/>
+          <p:cNvPr id="12" name="ocean:header"/>
           <p:cNvSpPr/>
           <p:nvPr/>
         </p:nvSpPr>
@@ -18516,7 +18558,7 @@
       </p:sp>
       <p:sp>
         <p:nvSpPr>
-          <p:cNvPr id="12" name="ocean:header"/>
+          <p:cNvPr id="13" name="ocean:header"/>
           <p:cNvSpPr/>
           <p:nvPr/>
         </p:nvSpPr>
@@ -18558,7 +18600,7 @@
       </p:sp>
       <p:sp>
         <p:nvSpPr>
-          <p:cNvPr id="13" name="Shape 10"/>
+          <p:cNvPr id="14" name="Shape 10"/>
           <p:cNvSpPr/>
           <p:nvPr/>
         </p:nvSpPr>
@@ -18581,7 +18623,7 @@
       </p:sp>
       <p:sp>
         <p:nvSpPr>
-          <p:cNvPr id="14" name="ocean:header"/>
+          <p:cNvPr id="15" name="ocean:header"/>
           <p:cNvSpPr/>
           <p:nvPr/>
         </p:nvSpPr>
@@ -18623,7 +18665,7 @@
       </p:sp>
       <p:sp>
         <p:nvSpPr>
-          <p:cNvPr id="15" name="ocean:header"/>
+          <p:cNvPr id="16" name="ocean:header"/>
           <p:cNvSpPr/>
           <p:nvPr/>
         </p:nvSpPr>
@@ -18665,7 +18707,7 @@
       </p:sp>
       <p:sp>
         <p:nvSpPr>
-          <p:cNvPr id="16" name="Shape 13"/>
+          <p:cNvPr id="17" name="Shape 13"/>
           <p:cNvSpPr/>
           <p:nvPr/>
         </p:nvSpPr>
@@ -18688,7 +18730,7 @@
       </p:sp>
       <p:sp>
         <p:nvSpPr>
-          <p:cNvPr id="17" name="ocean:header"/>
+          <p:cNvPr id="18" name="ocean:header"/>
           <p:cNvSpPr/>
           <p:nvPr/>
         </p:nvSpPr>
@@ -18730,7 +18772,7 @@
       </p:sp>
       <p:sp>
         <p:nvSpPr>
-          <p:cNvPr id="18" name="Shape 15"/>
+          <p:cNvPr id="19" name="Shape 15"/>
           <p:cNvSpPr/>
           <p:nvPr/>
         </p:nvSpPr>
@@ -18753,7 +18795,7 @@
       </p:sp>
       <p:sp>
         <p:nvSpPr>
-          <p:cNvPr id="19" name="Shape 16"/>
+          <p:cNvPr id="20" name="Shape 16"/>
           <p:cNvSpPr/>
           <p:nvPr/>
         </p:nvSpPr>
@@ -18778,7 +18820,7 @@
       </p:sp>
       <p:sp>
         <p:nvSpPr>
-          <p:cNvPr id="20" name="ocean:header"/>
+          <p:cNvPr id="21" name="ocean:header"/>
           <p:cNvSpPr/>
           <p:nvPr/>
         </p:nvSpPr>
@@ -18820,7 +18862,7 @@
       </p:sp>
       <p:sp>
         <p:nvSpPr>
-          <p:cNvPr id="21" name="Shape 18"/>
+          <p:cNvPr id="22" name="Shape 18"/>
           <p:cNvSpPr/>
           <p:nvPr/>
         </p:nvSpPr>
@@ -18843,7 +18885,7 @@
       </p:sp>
       <p:sp>
         <p:nvSpPr>
-          <p:cNvPr id="22" name="ocean:header"/>
+          <p:cNvPr id="23" name="ocean:header"/>
           <p:cNvSpPr/>
           <p:nvPr/>
         </p:nvSpPr>
@@ -18885,7 +18927,7 @@
       </p:sp>
       <p:sp>
         <p:nvSpPr>
-          <p:cNvPr id="23" name="Shape 20"/>
+          <p:cNvPr id="24" name="Shape 20"/>
           <p:cNvSpPr/>
           <p:nvPr/>
         </p:nvSpPr>
@@ -18908,7 +18950,7 @@
       </p:sp>
       <p:sp>
         <p:nvSpPr>
-          <p:cNvPr id="24" name="ocean:header"/>
+          <p:cNvPr id="25" name="ocean:header"/>
           <p:cNvSpPr/>
           <p:nvPr/>
         </p:nvSpPr>
@@ -18950,7 +18992,7 @@
       </p:sp>
       <p:sp>
         <p:nvSpPr>
-          <p:cNvPr id="25" name="ocean:label"/>
+          <p:cNvPr id="26" name="ocean:label"/>
           <p:cNvSpPr/>
           <p:nvPr/>
         </p:nvSpPr>
@@ -18992,7 +19034,7 @@
       </p:sp>
       <p:sp>
         <p:nvSpPr>
-          <p:cNvPr id="26" name="ocean:headline"/>
+          <p:cNvPr id="27" name="ocean:headline"/>
           <p:cNvSpPr/>
           <p:nvPr/>
         </p:nvSpPr>
@@ -19054,7 +19096,7 @@
       </p:sp>
       <p:sp>
         <p:nvSpPr>
-          <p:cNvPr id="27" name="ocean:lede"/>
+          <p:cNvPr id="28" name="ocean:lede"/>
           <p:cNvSpPr/>
           <p:nvPr/>
         </p:nvSpPr>
@@ -19136,7 +19178,7 @@
       </p:sp>
       <p:sp>
         <p:nvSpPr>
-          <p:cNvPr id="28" name="Shape 25"/>
+          <p:cNvPr id="29" name="Shape 25"/>
           <p:cNvSpPr/>
           <p:nvPr/>
         </p:nvSpPr>
@@ -19159,7 +19201,7 @@
       </p:sp>
       <p:sp>
         <p:nvSpPr>
-          <p:cNvPr id="29" name="Shape 26"/>
+          <p:cNvPr id="30" name="Shape 26"/>
           <p:cNvSpPr/>
           <p:nvPr/>
         </p:nvSpPr>
@@ -19182,7 +19224,7 @@
       </p:sp>
       <p:sp>
         <p:nvSpPr>
-          <p:cNvPr id="30" name="Shape 27"/>
+          <p:cNvPr id="31" name="Shape 27"/>
           <p:cNvSpPr/>
           <p:nvPr/>
         </p:nvSpPr>
@@ -19207,7 +19249,7 @@
       </p:sp>
       <p:sp>
         <p:nvSpPr>
-          <p:cNvPr id="31" name="ocean:label"/>
+          <p:cNvPr id="32" name="ocean:label"/>
           <p:cNvSpPr/>
           <p:nvPr/>
         </p:nvSpPr>
@@ -19249,7 +19291,7 @@
       </p:sp>
       <p:sp>
         <p:nvSpPr>
-          <p:cNvPr id="32" name="ocean:section"/>
+          <p:cNvPr id="33" name="ocean:section"/>
           <p:cNvSpPr/>
           <p:nvPr/>
         </p:nvSpPr>
@@ -19311,7 +19353,7 @@
       </p:sp>
       <p:sp>
         <p:nvSpPr>
-          <p:cNvPr id="33" name="ocean:body"/>
+          <p:cNvPr id="34" name="ocean:body"/>
           <p:cNvSpPr/>
           <p:nvPr/>
         </p:nvSpPr>
@@ -19373,7 +19415,7 @@
       </p:sp>
       <p:sp>
         <p:nvSpPr>
-          <p:cNvPr id="34" name="Shape 31"/>
+          <p:cNvPr id="35" name="Shape 31"/>
           <p:cNvSpPr/>
           <p:nvPr/>
         </p:nvSpPr>
@@ -19398,7 +19440,7 @@
       </p:sp>
       <p:sp>
         <p:nvSpPr>
-          <p:cNvPr id="35" name="ocean:label"/>
+          <p:cNvPr id="36" name="ocean:label"/>
           <p:cNvSpPr/>
           <p:nvPr/>
         </p:nvSpPr>
@@ -19440,7 +19482,7 @@
       </p:sp>
       <p:sp>
         <p:nvSpPr>
-          <p:cNvPr id="36" name="ocean:section"/>
+          <p:cNvPr id="37" name="ocean:section"/>
           <p:cNvSpPr/>
           <p:nvPr/>
         </p:nvSpPr>
@@ -19482,7 +19524,7 @@
       </p:sp>
       <p:sp>
         <p:nvSpPr>
-          <p:cNvPr id="37" name="ocean:body"/>
+          <p:cNvPr id="38" name="ocean:body"/>
           <p:cNvSpPr/>
           <p:nvPr/>
         </p:nvSpPr>
@@ -19544,7 +19586,7 @@
       </p:sp>
       <p:sp>
         <p:nvSpPr>
-          <p:cNvPr id="38" name="Shape 35"/>
+          <p:cNvPr id="39" name="Shape 35"/>
           <p:cNvSpPr/>
           <p:nvPr/>
         </p:nvSpPr>
@@ -19569,7 +19611,7 @@
       </p:sp>
       <p:sp>
         <p:nvSpPr>
-          <p:cNvPr id="39" name="ocean:label"/>
+          <p:cNvPr id="40" name="ocean:label"/>
           <p:cNvSpPr/>
           <p:nvPr/>
         </p:nvSpPr>
@@ -19611,7 +19653,7 @@
       </p:sp>
       <p:sp>
         <p:nvSpPr>
-          <p:cNvPr id="40" name="ocean:section"/>
+          <p:cNvPr id="41" name="ocean:section"/>
           <p:cNvSpPr/>
           <p:nvPr/>
         </p:nvSpPr>
@@ -19673,7 +19715,7 @@
       </p:sp>
       <p:sp>
         <p:nvSpPr>
-          <p:cNvPr id="41" name="ocean:body"/>
+          <p:cNvPr id="42" name="ocean:body"/>
           <p:cNvSpPr/>
           <p:nvPr/>
         </p:nvSpPr>
@@ -19715,7 +19757,7 @@
       </p:sp>
       <p:sp>
         <p:nvSpPr>
-          <p:cNvPr id="42" name="Shape 39"/>
+          <p:cNvPr id="43" name="Shape 39"/>
           <p:cNvSpPr/>
           <p:nvPr/>
         </p:nvSpPr>
@@ -19740,7 +19782,7 @@
       </p:sp>
       <p:sp>
         <p:nvSpPr>
-          <p:cNvPr id="43" name="ocean:label"/>
+          <p:cNvPr id="44" name="ocean:label"/>
           <p:cNvSpPr/>
           <p:nvPr/>
         </p:nvSpPr>
@@ -19782,7 +19824,7 @@
       </p:sp>
       <p:sp>
         <p:nvSpPr>
-          <p:cNvPr id="44" name="ocean:section"/>
+          <p:cNvPr id="45" name="ocean:section"/>
           <p:cNvSpPr/>
           <p:nvPr/>
         </p:nvSpPr>
@@ -19824,7 +19866,7 @@
       </p:sp>
       <p:sp>
         <p:nvSpPr>
-          <p:cNvPr id="45" name="ocean:body"/>
+          <p:cNvPr id="46" name="ocean:body"/>
           <p:cNvSpPr/>
           <p:nvPr/>
         </p:nvSpPr>
@@ -19866,7 +19908,7 @@
       </p:sp>
       <p:sp>
         <p:nvSpPr>
-          <p:cNvPr id="46" name="ocean:footnote"/>
+          <p:cNvPr id="47" name="ocean:footnote"/>
           <p:cNvSpPr/>
           <p:nvPr/>
         </p:nvSpPr>
@@ -19900,7 +19942,7 @@
                 <a:ea typeface="Stack Sans Headline Light" pitchFamily="34" charset="-122"/>
                 <a:cs typeface="Stack Sans Headline Light" pitchFamily="34" charset="-120"/>
               </a:rPr>
-              <a:t>OPPORTUNISTIC EQUIPMENT: TITLE, CONDITION, SERVICEABILITY AND SITE FIT VERIFIED BEFORE PURCHASE.</a:t>
+              <a:t>FORWARD-LOOKING AND SUBJECT TO DILIGENCE; NOT A GUARANTEE OF RETURNS.</a:t>
             </a:r>
             <a:endParaRPr lang="en-US" sz="900" dirty="0"/>
           </a:p>
@@ -19908,7 +19950,7 @@
       </p:sp>
       <p:sp>
         <p:nvSpPr>
-          <p:cNvPr id="47" name="ocean:footer"/>
+          <p:cNvPr id="48" name="ocean:footer"/>
           <p:cNvSpPr/>
           <p:nvPr/>
         </p:nvSpPr>
